--- a/Presentación TP Final.pptx
+++ b/Presentación TP Final.pptx
@@ -28999,10 +28999,10 @@
         </p:nvGrpSpPr>
         <p:grpSpPr>
           <a:xfrm rot="0">
-            <a:off x="914400" y="-7144"/>
-            <a:ext cx="16459200" cy="2018824"/>
+            <a:off x="706651" y="-1086250"/>
+            <a:ext cx="16459200" cy="4104817"/>
             <a:chOff x="0" y="0"/>
-            <a:chExt cx="21945600" cy="2691765"/>
+            <a:chExt cx="21945600" cy="5473089"/>
           </a:xfrm>
         </p:grpSpPr>
         <p:sp>
@@ -29014,7 +29014,7 @@
           <p:spPr>
             <a:xfrm flipH="false" flipV="false" rot="0">
               <a:off x="0" y="0"/>
-              <a:ext cx="21945600" cy="2691765"/>
+              <a:ext cx="21945600" cy="5473089"/>
             </a:xfrm>
             <a:custGeom>
               <a:avLst/>
@@ -29023,7 +29023,7 @@
               <a:cxnLst/>
               <a:rect r="r" b="b" t="t" l="l"/>
               <a:pathLst>
-                <a:path h="2691765" w="21945600">
+                <a:path h="5473089" w="21945600">
                   <a:moveTo>
                     <a:pt x="0" y="0"/>
                   </a:moveTo>
@@ -29031,10 +29031,10 @@
                     <a:pt x="21945600" y="0"/>
                   </a:lnTo>
                   <a:lnTo>
-                    <a:pt x="21945600" y="2691765"/>
-                  </a:lnTo>
-                  <a:lnTo>
-                    <a:pt x="0" y="2691765"/>
+                    <a:pt x="21945600" y="5473089"/>
+                  </a:lnTo>
+                  <a:lnTo>
+                    <a:pt x="0" y="5473089"/>
                   </a:lnTo>
                   <a:close/>
                 </a:path>
@@ -29045,7 +29045,7 @@
                 <a:alphaModFix amt="0"/>
               </a:blip>
               <a:stretch>
-                <a:fillRect l="0" t="-108858" r="0" b="-108858"/>
+                <a:fillRect l="0" t="-53538" r="0" b="-2720"/>
               </a:stretch>
             </a:blipFill>
           </p:spPr>
@@ -29059,7 +29059,7 @@
           <p:spPr>
             <a:xfrm>
               <a:off x="0" y="-9525"/>
-              <a:ext cx="21945600" cy="2701290"/>
+              <a:ext cx="21945600" cy="5482614"/>
             </a:xfrm>
             <a:prstGeom prst="rect">
               <a:avLst/>
@@ -29084,7 +29084,7 @@
                   <a:cs typeface="Cambria Bold"/>
                   <a:sym typeface="Cambria Bold"/>
                 </a:rPr>
-                <a:t>Diagramas de Flujo</a:t>
+                <a:t>Uso de diccionario</a:t>
               </a:r>
             </a:p>
           </p:txBody>
